--- a/presentations/aws-finops-agent-presentation.pptx
+++ b/presentations/aws-finops-agent-presentation.pptx
@@ -2032,7 +2032,7 @@
           <a:p/>
           <a:p>
             <a:r>
-              <a:t>Prompt: For authorized real data, compare storage costs for the selected accounts over two complete 14-day windows using the same unblended basis. Identify leading drivers only where breakdown evidence is available, separate usage from rate effects, and label correlated CloudTrail changes as hypotheses. For the bundled synthetic fixture, reconcile the $1,400 and $1,974 totals only; do not invent drivers. Do not modify infrastructure.</a:t>
+              <a:t>Prompt: Reconcile synthetic totals of $1,400 and $1,974 (41% higher). This fixture cannot establish drivers. For authorized real data, match periods and cost basis before testing usage, rate and change hypotheses. Do not modify infrastructure.</a:t>
             </a:r>
           </a:p>
           <a:p/>
@@ -2048,7 +2048,7 @@
           </a:p>
           <a:p>
             <a:r>
-              <a:t>01:30 — Reconcile the totals: Use the synthetic period totals for arithmetic; inspect driver breakdowns only with matching authorized data.</a:t>
+              <a:t>01:30 — Reconcile the totals: Reconcile the fixture totals; require source breakdowns for any driver claim.</a:t>
             </a:r>
           </a:p>
           <a:p>
@@ -18921,7 +18921,7 @@
               </a:defRPr>
             </a:pPr>
             <a:r>
-              <a:t>For authorized real data, compare storage costs for the selected accounts over two complete 14-day windows using the same unblended basis. Identify leading drivers only where breakdown evidence is available, separate usage from rate effects, and label correlated CloudTrail changes as hypotheses. For the bundled synthetic fixture, reconcile the $1,400 and $1,974 totals only; do not invent drivers. Do not modify infrastructure.</a:t>
+              <a:t>Reconcile synthetic totals of $1,400 and $1,974 (41% higher). This fixture cannot establish drivers. For authorized real data, match periods and cost basis before testing usage, rate and change hypotheses. Do not modify infrastructure.</a:t>
             </a:r>
           </a:p>
         </p:txBody>
@@ -19507,7 +19507,7 @@
               <a:spcAft>
                 <a:spcPts val="300"/>
               </a:spcAft>
-              <a:defRPr sz="1200" b="0">
+              <a:defRPr sz="1300" b="0">
                 <a:solidFill>
                   <a:srgbClr val="182B43"/>
                 </a:solidFill>
@@ -19515,7 +19515,7 @@
               </a:defRPr>
             </a:pPr>
             <a:r>
-              <a:t>Use the synthetic period totals for arithmetic; inspect driver breakdowns only with matching authorized data.</a:t>
+              <a:t>Reconcile the fixture totals; require source breakdowns for any driver claim.</a:t>
             </a:r>
           </a:p>
         </p:txBody>

--- a/presentations/aws-finops-agent-presentation.pptx
+++ b/presentations/aws-finops-agent-presentation.pptx
@@ -18848,7 +18848,7 @@
         <p:spPr>
           <a:xfrm>
             <a:off x="502920" y="2295144"/>
-            <a:ext cx="11183112" cy="795528"/>
+            <a:ext cx="11183112" cy="969264"/>
           </a:xfrm>
           <a:prstGeom prst="roundRect">
             <a:avLst>
@@ -18892,28 +18892,28 @@
         </p:nvSpPr>
         <p:spPr>
           <a:xfrm>
-            <a:off x="704088" y="2450592"/>
-            <a:ext cx="10789920" cy="475488"/>
-          </a:xfrm>
-          <a:prstGeom prst="rect">
-            <a:avLst/>
-          </a:prstGeom>
-          <a:noFill/>
-        </p:spPr>
-        <p:txBody>
-          <a:bodyPr wrap="square" lIns="0" rIns="0" tIns="0" bIns="0" anchor="t">
-            <a:spAutoFit/>
-          </a:bodyPr>
-          <a:lstStyle/>
-          <a:p>
-            <a:pPr>
-              <a:lnSpc>
-                <a:spcPct val="112000"/>
-              </a:lnSpc>
-              <a:spcAft>
-                <a:spcPts val="300"/>
-              </a:spcAft>
-              <a:defRPr sz="1400" b="0">
+            <a:off x="704088" y="2432304"/>
+            <a:ext cx="10789920" cy="713232"/>
+          </a:xfrm>
+          <a:prstGeom prst="rect">
+            <a:avLst/>
+          </a:prstGeom>
+          <a:noFill/>
+        </p:spPr>
+        <p:txBody>
+          <a:bodyPr wrap="square" lIns="0" rIns="0" tIns="0" bIns="0" anchor="t">
+            <a:spAutoFit/>
+          </a:bodyPr>
+          <a:lstStyle/>
+          <a:p>
+            <a:pPr>
+              <a:lnSpc>
+                <a:spcPct val="112000"/>
+              </a:lnSpc>
+              <a:spcAft>
+                <a:spcPts val="300"/>
+              </a:spcAft>
+              <a:defRPr sz="1500" b="0">
                 <a:solidFill>
                   <a:srgbClr val="FFFFFF"/>
                 </a:solidFill>
@@ -18934,7 +18934,7 @@
         </p:nvSpPr>
         <p:spPr>
           <a:xfrm>
-            <a:off x="502920" y="3264408"/>
+            <a:off x="502920" y="3429000"/>
             <a:ext cx="3200400" cy="201168"/>
           </a:xfrm>
           <a:prstGeom prst="rect">
@@ -18976,7 +18976,7 @@
         </p:nvSpPr>
         <p:spPr>
           <a:xfrm>
-            <a:off x="502920" y="3520439"/>
+            <a:off x="502920" y="3685032"/>
             <a:ext cx="3337560" cy="612648"/>
           </a:xfrm>
           <a:prstGeom prst="rect">
@@ -19018,7 +19018,7 @@
         </p:nvSpPr>
         <p:spPr>
           <a:xfrm>
-            <a:off x="502920" y="4224528"/>
+            <a:off x="502920" y="4389120"/>
             <a:ext cx="3200400" cy="201168"/>
           </a:xfrm>
           <a:prstGeom prst="rect">
@@ -19060,7 +19060,7 @@
         </p:nvSpPr>
         <p:spPr>
           <a:xfrm>
-            <a:off x="502920" y="4480560"/>
+            <a:off x="502920" y="4645152"/>
             <a:ext cx="3337560" cy="612648"/>
           </a:xfrm>
           <a:prstGeom prst="rect">
@@ -19102,7 +19102,7 @@
         </p:nvSpPr>
         <p:spPr>
           <a:xfrm>
-            <a:off x="502920" y="5184648"/>
+            <a:off x="502920" y="5349240"/>
             <a:ext cx="3200400" cy="201168"/>
           </a:xfrm>
           <a:prstGeom prst="rect">
@@ -19144,7 +19144,7 @@
         </p:nvSpPr>
         <p:spPr>
           <a:xfrm>
-            <a:off x="502920" y="5440680"/>
+            <a:off x="502920" y="5605272"/>
             <a:ext cx="3337560" cy="612648"/>
           </a:xfrm>
           <a:prstGeom prst="rect">
@@ -19186,8 +19186,8 @@
         </p:nvSpPr>
         <p:spPr>
           <a:xfrm>
-            <a:off x="4096512" y="3246120"/>
-            <a:ext cx="7589520" cy="534009"/>
+            <a:off x="4096512" y="3410712"/>
+            <a:ext cx="7589520" cy="501091"/>
           </a:xfrm>
           <a:prstGeom prst="roundRect">
             <a:avLst>
@@ -19231,7 +19231,7 @@
         </p:nvSpPr>
         <p:spPr>
           <a:xfrm>
-            <a:off x="4233672" y="3355848"/>
+            <a:off x="4233672" y="3520440"/>
             <a:ext cx="594360" cy="256032"/>
           </a:xfrm>
           <a:prstGeom prst="rect">
@@ -19273,7 +19273,7 @@
         </p:nvSpPr>
         <p:spPr>
           <a:xfrm>
-            <a:off x="4937760" y="3319272"/>
+            <a:off x="4937760" y="3483864"/>
             <a:ext cx="6537960" cy="219456"/>
           </a:xfrm>
           <a:prstGeom prst="rect">
@@ -19315,28 +19315,28 @@
         </p:nvSpPr>
         <p:spPr>
           <a:xfrm>
-            <a:off x="4937760" y="3557015"/>
-            <a:ext cx="6537960" cy="232257"/>
-          </a:xfrm>
-          <a:prstGeom prst="rect">
-            <a:avLst/>
-          </a:prstGeom>
-          <a:noFill/>
-        </p:spPr>
-        <p:txBody>
-          <a:bodyPr wrap="square" lIns="0" rIns="0" tIns="0" bIns="0" anchor="t">
-            <a:spAutoFit/>
-          </a:bodyPr>
-          <a:lstStyle/>
-          <a:p>
-            <a:pPr>
-              <a:lnSpc>
-                <a:spcPct val="112000"/>
-              </a:lnSpc>
-              <a:spcAft>
-                <a:spcPts val="300"/>
-              </a:spcAft>
-              <a:defRPr sz="1400" b="0">
+            <a:off x="4937760" y="3685032"/>
+            <a:ext cx="6537960" cy="263347"/>
+          </a:xfrm>
+          <a:prstGeom prst="rect">
+            <a:avLst/>
+          </a:prstGeom>
+          <a:noFill/>
+        </p:spPr>
+        <p:txBody>
+          <a:bodyPr wrap="square" lIns="0" rIns="0" tIns="0" bIns="0" anchor="t">
+            <a:spAutoFit/>
+          </a:bodyPr>
+          <a:lstStyle/>
+          <a:p>
+            <a:pPr>
+              <a:lnSpc>
+                <a:spcPct val="112000"/>
+              </a:lnSpc>
+              <a:spcAft>
+                <a:spcPts val="300"/>
+              </a:spcAft>
+              <a:defRPr sz="1350" b="0">
                 <a:solidFill>
                   <a:srgbClr val="182B43"/>
                 </a:solidFill>
@@ -19357,8 +19357,8 @@
         </p:nvSpPr>
         <p:spPr>
           <a:xfrm>
-            <a:off x="4096512" y="3834993"/>
-            <a:ext cx="7589520" cy="534009"/>
+            <a:off x="4096512" y="3966667"/>
+            <a:ext cx="7589520" cy="501091"/>
           </a:xfrm>
           <a:prstGeom prst="roundRect">
             <a:avLst>
@@ -19402,7 +19402,7 @@
         </p:nvSpPr>
         <p:spPr>
           <a:xfrm>
-            <a:off x="4233672" y="3944721"/>
+            <a:off x="4233672" y="4076395"/>
             <a:ext cx="594360" cy="256032"/>
           </a:xfrm>
           <a:prstGeom prst="rect">
@@ -19444,7 +19444,7 @@
         </p:nvSpPr>
         <p:spPr>
           <a:xfrm>
-            <a:off x="4937760" y="3908145"/>
+            <a:off x="4937760" y="4039819"/>
             <a:ext cx="6537960" cy="219456"/>
           </a:xfrm>
           <a:prstGeom prst="rect">
@@ -19486,8 +19486,8 @@
         </p:nvSpPr>
         <p:spPr>
           <a:xfrm>
-            <a:off x="4937760" y="4145889"/>
-            <a:ext cx="6537960" cy="232257"/>
+            <a:off x="4937760" y="4240987"/>
+            <a:ext cx="6537960" cy="263347"/>
           </a:xfrm>
           <a:prstGeom prst="rect">
             <a:avLst/>
@@ -19528,8 +19528,8 @@
         </p:nvSpPr>
         <p:spPr>
           <a:xfrm>
-            <a:off x="4096512" y="4423867"/>
-            <a:ext cx="7589520" cy="534009"/>
+            <a:off x="4096512" y="4522622"/>
+            <a:ext cx="7589520" cy="501091"/>
           </a:xfrm>
           <a:prstGeom prst="roundRect">
             <a:avLst>
@@ -19573,7 +19573,7 @@
         </p:nvSpPr>
         <p:spPr>
           <a:xfrm>
-            <a:off x="4233672" y="4533595"/>
+            <a:off x="4233672" y="4632350"/>
             <a:ext cx="594360" cy="256032"/>
           </a:xfrm>
           <a:prstGeom prst="rect">
@@ -19615,7 +19615,7 @@
         </p:nvSpPr>
         <p:spPr>
           <a:xfrm>
-            <a:off x="4937760" y="4497019"/>
+            <a:off x="4937760" y="4595774"/>
             <a:ext cx="6537960" cy="219456"/>
           </a:xfrm>
           <a:prstGeom prst="rect">
@@ -19657,28 +19657,28 @@
         </p:nvSpPr>
         <p:spPr>
           <a:xfrm>
-            <a:off x="4937760" y="4734763"/>
-            <a:ext cx="6537960" cy="232257"/>
-          </a:xfrm>
-          <a:prstGeom prst="rect">
-            <a:avLst/>
-          </a:prstGeom>
-          <a:noFill/>
-        </p:spPr>
-        <p:txBody>
-          <a:bodyPr wrap="square" lIns="0" rIns="0" tIns="0" bIns="0" anchor="t">
-            <a:spAutoFit/>
-          </a:bodyPr>
-          <a:lstStyle/>
-          <a:p>
-            <a:pPr>
-              <a:lnSpc>
-                <a:spcPct val="112000"/>
-              </a:lnSpc>
-              <a:spcAft>
-                <a:spcPts val="300"/>
-              </a:spcAft>
-              <a:defRPr sz="1400" b="0">
+            <a:off x="4937760" y="4796942"/>
+            <a:ext cx="6537960" cy="263347"/>
+          </a:xfrm>
+          <a:prstGeom prst="rect">
+            <a:avLst/>
+          </a:prstGeom>
+          <a:noFill/>
+        </p:spPr>
+        <p:txBody>
+          <a:bodyPr wrap="square" lIns="0" rIns="0" tIns="0" bIns="0" anchor="t">
+            <a:spAutoFit/>
+          </a:bodyPr>
+          <a:lstStyle/>
+          <a:p>
+            <a:pPr>
+              <a:lnSpc>
+                <a:spcPct val="112000"/>
+              </a:lnSpc>
+              <a:spcAft>
+                <a:spcPts val="300"/>
+              </a:spcAft>
+              <a:defRPr sz="1350" b="0">
                 <a:solidFill>
                   <a:srgbClr val="182B43"/>
                 </a:solidFill>
@@ -19699,8 +19699,8 @@
         </p:nvSpPr>
         <p:spPr>
           <a:xfrm>
-            <a:off x="4096512" y="5012740"/>
-            <a:ext cx="7589520" cy="534009"/>
+            <a:off x="4096512" y="5078577"/>
+            <a:ext cx="7589520" cy="501091"/>
           </a:xfrm>
           <a:prstGeom prst="roundRect">
             <a:avLst>
@@ -19744,7 +19744,7 @@
         </p:nvSpPr>
         <p:spPr>
           <a:xfrm>
-            <a:off x="4233672" y="5122468"/>
+            <a:off x="4233672" y="5188305"/>
             <a:ext cx="594360" cy="256032"/>
           </a:xfrm>
           <a:prstGeom prst="rect">
@@ -19786,7 +19786,7 @@
         </p:nvSpPr>
         <p:spPr>
           <a:xfrm>
-            <a:off x="4937760" y="5085892"/>
+            <a:off x="4937760" y="5151729"/>
             <a:ext cx="6537960" cy="219456"/>
           </a:xfrm>
           <a:prstGeom prst="rect">
@@ -19828,28 +19828,28 @@
         </p:nvSpPr>
         <p:spPr>
           <a:xfrm>
-            <a:off x="4937760" y="5323636"/>
-            <a:ext cx="6537960" cy="232257"/>
-          </a:xfrm>
-          <a:prstGeom prst="rect">
-            <a:avLst/>
-          </a:prstGeom>
-          <a:noFill/>
-        </p:spPr>
-        <p:txBody>
-          <a:bodyPr wrap="square" lIns="0" rIns="0" tIns="0" bIns="0" anchor="t">
-            <a:spAutoFit/>
-          </a:bodyPr>
-          <a:lstStyle/>
-          <a:p>
-            <a:pPr>
-              <a:lnSpc>
-                <a:spcPct val="112000"/>
-              </a:lnSpc>
-              <a:spcAft>
-                <a:spcPts val="300"/>
-              </a:spcAft>
-              <a:defRPr sz="1400" b="0">
+            <a:off x="4937760" y="5352897"/>
+            <a:ext cx="6537960" cy="263347"/>
+          </a:xfrm>
+          <a:prstGeom prst="rect">
+            <a:avLst/>
+          </a:prstGeom>
+          <a:noFill/>
+        </p:spPr>
+        <p:txBody>
+          <a:bodyPr wrap="square" lIns="0" rIns="0" tIns="0" bIns="0" anchor="t">
+            <a:spAutoFit/>
+          </a:bodyPr>
+          <a:lstStyle/>
+          <a:p>
+            <a:pPr>
+              <a:lnSpc>
+                <a:spcPct val="112000"/>
+              </a:lnSpc>
+              <a:spcAft>
+                <a:spcPts val="300"/>
+              </a:spcAft>
+              <a:defRPr sz="1350" b="0">
                 <a:solidFill>
                   <a:srgbClr val="182B43"/>
                 </a:solidFill>
@@ -19870,8 +19870,8 @@
         </p:nvSpPr>
         <p:spPr>
           <a:xfrm>
-            <a:off x="4096512" y="5601614"/>
-            <a:ext cx="7589520" cy="534009"/>
+            <a:off x="4096512" y="5634532"/>
+            <a:ext cx="7589520" cy="501091"/>
           </a:xfrm>
           <a:prstGeom prst="roundRect">
             <a:avLst>
@@ -19915,7 +19915,7 @@
         </p:nvSpPr>
         <p:spPr>
           <a:xfrm>
-            <a:off x="4233672" y="5711342"/>
+            <a:off x="4233672" y="5744260"/>
             <a:ext cx="594360" cy="256032"/>
           </a:xfrm>
           <a:prstGeom prst="rect">
@@ -19957,7 +19957,7 @@
         </p:nvSpPr>
         <p:spPr>
           <a:xfrm>
-            <a:off x="4937760" y="5674766"/>
+            <a:off x="4937760" y="5707684"/>
             <a:ext cx="6537960" cy="219456"/>
           </a:xfrm>
           <a:prstGeom prst="rect">
@@ -19999,28 +19999,28 @@
         </p:nvSpPr>
         <p:spPr>
           <a:xfrm>
-            <a:off x="4937760" y="5912510"/>
-            <a:ext cx="6537960" cy="232257"/>
-          </a:xfrm>
-          <a:prstGeom prst="rect">
-            <a:avLst/>
-          </a:prstGeom>
-          <a:noFill/>
-        </p:spPr>
-        <p:txBody>
-          <a:bodyPr wrap="square" lIns="0" rIns="0" tIns="0" bIns="0" anchor="t">
-            <a:spAutoFit/>
-          </a:bodyPr>
-          <a:lstStyle/>
-          <a:p>
-            <a:pPr>
-              <a:lnSpc>
-                <a:spcPct val="112000"/>
-              </a:lnSpc>
-              <a:spcAft>
-                <a:spcPts val="300"/>
-              </a:spcAft>
-              <a:defRPr sz="1400" b="0">
+            <a:off x="4937760" y="5908852"/>
+            <a:ext cx="6537960" cy="263347"/>
+          </a:xfrm>
+          <a:prstGeom prst="rect">
+            <a:avLst/>
+          </a:prstGeom>
+          <a:noFill/>
+        </p:spPr>
+        <p:txBody>
+          <a:bodyPr wrap="square" lIns="0" rIns="0" tIns="0" bIns="0" anchor="t">
+            <a:spAutoFit/>
+          </a:bodyPr>
+          <a:lstStyle/>
+          <a:p>
+            <a:pPr>
+              <a:lnSpc>
+                <a:spcPct val="112000"/>
+              </a:lnSpc>
+              <a:spcAft>
+                <a:spcPts val="300"/>
+              </a:spcAft>
+              <a:defRPr sz="1350" b="0">
                 <a:solidFill>
                   <a:srgbClr val="182B43"/>
                 </a:solidFill>
